--- a/宣道詩/(宣道詩144) 生命之道.pptx
+++ b/宣道詩/(宣道詩144) 生命之道.pptx
@@ -326,6 +326,11 @@
         </p:txBody>
       </p:sp>
     </p:spTree>
+    <p:extLst>
+      <p:ext uri="{BB962C8B-B14F-4D97-AF65-F5344CB8AC3E}">
+        <p14:creationId xmlns:p14="http://schemas.microsoft.com/office/powerpoint/2010/main" val="1"/>
+      </p:ext>
+    </p:extLst>
   </p:cSld>
   <p:clrMap bg1="lt1" tx1="dk1" bg2="lt2" tx2="dk2" accent1="accent1" accent2="accent2" accent3="accent3" accent4="accent4" accent5="accent5" accent6="accent6" hlink="hlink" folHlink="folHlink"/>
 </p:handoutMaster>
@@ -475,38 +480,37 @@
           <a:p>
             <a:pPr lvl="0"/>
             <a:r>
-              <a:rPr lang="zh-TW" altLang="en-US" smtClean="0"/>
+              <a:rPr lang="zh-TW" altLang="en-US"/>
               <a:t>按一下以編輯母片文字樣式</a:t>
             </a:r>
           </a:p>
           <a:p>
             <a:pPr lvl="1"/>
             <a:r>
-              <a:rPr lang="zh-TW" altLang="en-US" smtClean="0"/>
+              <a:rPr lang="zh-TW" altLang="en-US"/>
               <a:t>第二層</a:t>
             </a:r>
           </a:p>
           <a:p>
             <a:pPr lvl="2"/>
             <a:r>
-              <a:rPr lang="zh-TW" altLang="en-US" smtClean="0"/>
+              <a:rPr lang="zh-TW" altLang="en-US"/>
               <a:t>第三層</a:t>
             </a:r>
           </a:p>
           <a:p>
             <a:pPr lvl="3"/>
             <a:r>
-              <a:rPr lang="zh-TW" altLang="en-US" smtClean="0"/>
+              <a:rPr lang="zh-TW" altLang="en-US"/>
               <a:t>第四層</a:t>
             </a:r>
           </a:p>
           <a:p>
             <a:pPr lvl="4"/>
             <a:r>
-              <a:rPr lang="zh-TW" altLang="en-US" smtClean="0"/>
+              <a:rPr lang="zh-TW" altLang="en-US"/>
               <a:t>第五層</a:t>
             </a:r>
-            <a:endParaRPr lang="zh-TW" altLang="en-US"/>
           </a:p>
         </p:txBody>
       </p:sp>
@@ -712,7 +716,7 @@
           <a:lstStyle/>
           <a:p>
             <a:r>
-              <a:rPr lang="en-US" altLang="zh-TW" smtClean="0"/>
+              <a:rPr lang="en-US" altLang="zh-TW"/>
               <a:t>Click to edit Master title style</a:t>
             </a:r>
             <a:endParaRPr lang="zh-TW" altLang="en-US"/>
@@ -831,7 +835,7 @@
           </a:lstStyle>
           <a:p>
             <a:r>
-              <a:rPr lang="en-US" altLang="zh-TW" smtClean="0"/>
+              <a:rPr lang="en-US" altLang="zh-TW"/>
               <a:t>Click to edit Master subtitle style</a:t>
             </a:r>
             <a:endParaRPr lang="zh-TW" altLang="en-US"/>
@@ -954,7 +958,7 @@
           <a:lstStyle/>
           <a:p>
             <a:r>
-              <a:rPr lang="en-US" altLang="zh-TW" smtClean="0"/>
+              <a:rPr lang="en-US" altLang="zh-TW"/>
               <a:t>Click to edit Master title style</a:t>
             </a:r>
             <a:endParaRPr lang="zh-TW" altLang="en-US"/>
@@ -978,35 +982,35 @@
           <a:p>
             <a:pPr lvl="0"/>
             <a:r>
-              <a:rPr lang="en-US" altLang="zh-TW" smtClean="0"/>
+              <a:rPr lang="en-US" altLang="zh-TW"/>
               <a:t>Edit Master text styles</a:t>
             </a:r>
           </a:p>
           <a:p>
             <a:pPr lvl="1"/>
             <a:r>
-              <a:rPr lang="en-US" altLang="zh-TW" smtClean="0"/>
+              <a:rPr lang="en-US" altLang="zh-TW"/>
               <a:t>Second level</a:t>
             </a:r>
           </a:p>
           <a:p>
             <a:pPr lvl="2"/>
             <a:r>
-              <a:rPr lang="en-US" altLang="zh-TW" smtClean="0"/>
+              <a:rPr lang="en-US" altLang="zh-TW"/>
               <a:t>Third level</a:t>
             </a:r>
           </a:p>
           <a:p>
             <a:pPr lvl="3"/>
             <a:r>
-              <a:rPr lang="en-US" altLang="zh-TW" smtClean="0"/>
+              <a:rPr lang="en-US" altLang="zh-TW"/>
               <a:t>Fourth level</a:t>
             </a:r>
           </a:p>
           <a:p>
             <a:pPr lvl="4"/>
             <a:r>
-              <a:rPr lang="en-US" altLang="zh-TW" smtClean="0"/>
+              <a:rPr lang="en-US" altLang="zh-TW"/>
               <a:t>Fifth level</a:t>
             </a:r>
             <a:endParaRPr lang="zh-TW" altLang="en-US"/>
@@ -1134,7 +1138,7 @@
           <a:lstStyle/>
           <a:p>
             <a:r>
-              <a:rPr lang="en-US" altLang="zh-TW" smtClean="0"/>
+              <a:rPr lang="en-US" altLang="zh-TW"/>
               <a:t>Click to edit Master title style</a:t>
             </a:r>
             <a:endParaRPr lang="zh-TW" altLang="en-US"/>
@@ -1163,35 +1167,35 @@
           <a:p>
             <a:pPr lvl="0"/>
             <a:r>
-              <a:rPr lang="en-US" altLang="zh-TW" smtClean="0"/>
+              <a:rPr lang="en-US" altLang="zh-TW"/>
               <a:t>Edit Master text styles</a:t>
             </a:r>
           </a:p>
           <a:p>
             <a:pPr lvl="1"/>
             <a:r>
-              <a:rPr lang="en-US" altLang="zh-TW" smtClean="0"/>
+              <a:rPr lang="en-US" altLang="zh-TW"/>
               <a:t>Second level</a:t>
             </a:r>
           </a:p>
           <a:p>
             <a:pPr lvl="2"/>
             <a:r>
-              <a:rPr lang="en-US" altLang="zh-TW" smtClean="0"/>
+              <a:rPr lang="en-US" altLang="zh-TW"/>
               <a:t>Third level</a:t>
             </a:r>
           </a:p>
           <a:p>
             <a:pPr lvl="3"/>
             <a:r>
-              <a:rPr lang="en-US" altLang="zh-TW" smtClean="0"/>
+              <a:rPr lang="en-US" altLang="zh-TW"/>
               <a:t>Fourth level</a:t>
             </a:r>
           </a:p>
           <a:p>
             <a:pPr lvl="4"/>
             <a:r>
-              <a:rPr lang="en-US" altLang="zh-TW" smtClean="0"/>
+              <a:rPr lang="en-US" altLang="zh-TW"/>
               <a:t>Fifth level</a:t>
             </a:r>
             <a:endParaRPr lang="zh-TW" altLang="en-US"/>
@@ -1314,7 +1318,7 @@
           <a:lstStyle/>
           <a:p>
             <a:r>
-              <a:rPr lang="en-US" altLang="zh-TW" smtClean="0"/>
+              <a:rPr lang="en-US" altLang="zh-TW"/>
               <a:t>Click to edit Master title style</a:t>
             </a:r>
             <a:endParaRPr lang="zh-TW" altLang="en-US"/>
@@ -1338,35 +1342,35 @@
           <a:p>
             <a:pPr lvl="0"/>
             <a:r>
-              <a:rPr lang="en-US" altLang="zh-TW" smtClean="0"/>
+              <a:rPr lang="en-US" altLang="zh-TW"/>
               <a:t>Edit Master text styles</a:t>
             </a:r>
           </a:p>
           <a:p>
             <a:pPr lvl="1"/>
             <a:r>
-              <a:rPr lang="en-US" altLang="zh-TW" smtClean="0"/>
+              <a:rPr lang="en-US" altLang="zh-TW"/>
               <a:t>Second level</a:t>
             </a:r>
           </a:p>
           <a:p>
             <a:pPr lvl="2"/>
             <a:r>
-              <a:rPr lang="en-US" altLang="zh-TW" smtClean="0"/>
+              <a:rPr lang="en-US" altLang="zh-TW"/>
               <a:t>Third level</a:t>
             </a:r>
           </a:p>
           <a:p>
             <a:pPr lvl="3"/>
             <a:r>
-              <a:rPr lang="en-US" altLang="zh-TW" smtClean="0"/>
+              <a:rPr lang="en-US" altLang="zh-TW"/>
               <a:t>Fourth level</a:t>
             </a:r>
           </a:p>
           <a:p>
             <a:pPr lvl="4"/>
             <a:r>
-              <a:rPr lang="en-US" altLang="zh-TW" smtClean="0"/>
+              <a:rPr lang="en-US" altLang="zh-TW"/>
               <a:t>Fifth level</a:t>
             </a:r>
             <a:endParaRPr lang="zh-TW" altLang="en-US"/>
@@ -1498,7 +1502,7 @@
           </a:lstStyle>
           <a:p>
             <a:r>
-              <a:rPr lang="en-US" altLang="zh-TW" smtClean="0"/>
+              <a:rPr lang="en-US" altLang="zh-TW"/>
               <a:t>Click to edit Master title style</a:t>
             </a:r>
             <a:endParaRPr lang="zh-TW" altLang="en-US"/>
@@ -1618,7 +1622,7 @@
           <a:p>
             <a:pPr lvl="0"/>
             <a:r>
-              <a:rPr lang="en-US" altLang="zh-TW" smtClean="0"/>
+              <a:rPr lang="en-US" altLang="zh-TW"/>
               <a:t>Edit Master text styles</a:t>
             </a:r>
           </a:p>
@@ -1740,7 +1744,7 @@
           <a:lstStyle/>
           <a:p>
             <a:r>
-              <a:rPr lang="en-US" altLang="zh-TW" smtClean="0"/>
+              <a:rPr lang="en-US" altLang="zh-TW"/>
               <a:t>Click to edit Master title style</a:t>
             </a:r>
             <a:endParaRPr lang="zh-TW" altLang="en-US"/>
@@ -1797,35 +1801,35 @@
           <a:p>
             <a:pPr lvl="0"/>
             <a:r>
-              <a:rPr lang="en-US" altLang="zh-TW" smtClean="0"/>
+              <a:rPr lang="en-US" altLang="zh-TW"/>
               <a:t>Edit Master text styles</a:t>
             </a:r>
           </a:p>
           <a:p>
             <a:pPr lvl="1"/>
             <a:r>
-              <a:rPr lang="en-US" altLang="zh-TW" smtClean="0"/>
+              <a:rPr lang="en-US" altLang="zh-TW"/>
               <a:t>Second level</a:t>
             </a:r>
           </a:p>
           <a:p>
             <a:pPr lvl="2"/>
             <a:r>
-              <a:rPr lang="en-US" altLang="zh-TW" smtClean="0"/>
+              <a:rPr lang="en-US" altLang="zh-TW"/>
               <a:t>Third level</a:t>
             </a:r>
           </a:p>
           <a:p>
             <a:pPr lvl="3"/>
             <a:r>
-              <a:rPr lang="en-US" altLang="zh-TW" smtClean="0"/>
+              <a:rPr lang="en-US" altLang="zh-TW"/>
               <a:t>Fourth level</a:t>
             </a:r>
           </a:p>
           <a:p>
             <a:pPr lvl="4"/>
             <a:r>
-              <a:rPr lang="en-US" altLang="zh-TW" smtClean="0"/>
+              <a:rPr lang="en-US" altLang="zh-TW"/>
               <a:t>Fifth level</a:t>
             </a:r>
             <a:endParaRPr lang="zh-TW" altLang="en-US"/>
@@ -1882,35 +1886,35 @@
           <a:p>
             <a:pPr lvl="0"/>
             <a:r>
-              <a:rPr lang="en-US" altLang="zh-TW" smtClean="0"/>
+              <a:rPr lang="en-US" altLang="zh-TW"/>
               <a:t>Edit Master text styles</a:t>
             </a:r>
           </a:p>
           <a:p>
             <a:pPr lvl="1"/>
             <a:r>
-              <a:rPr lang="en-US" altLang="zh-TW" smtClean="0"/>
+              <a:rPr lang="en-US" altLang="zh-TW"/>
               <a:t>Second level</a:t>
             </a:r>
           </a:p>
           <a:p>
             <a:pPr lvl="2"/>
             <a:r>
-              <a:rPr lang="en-US" altLang="zh-TW" smtClean="0"/>
+              <a:rPr lang="en-US" altLang="zh-TW"/>
               <a:t>Third level</a:t>
             </a:r>
           </a:p>
           <a:p>
             <a:pPr lvl="3"/>
             <a:r>
-              <a:rPr lang="en-US" altLang="zh-TW" smtClean="0"/>
+              <a:rPr lang="en-US" altLang="zh-TW"/>
               <a:t>Fourth level</a:t>
             </a:r>
           </a:p>
           <a:p>
             <a:pPr lvl="4"/>
             <a:r>
-              <a:rPr lang="en-US" altLang="zh-TW" smtClean="0"/>
+              <a:rPr lang="en-US" altLang="zh-TW"/>
               <a:t>Fifth level</a:t>
             </a:r>
             <a:endParaRPr lang="zh-TW" altLang="en-US"/>
@@ -2037,7 +2041,7 @@
           </a:lstStyle>
           <a:p>
             <a:r>
-              <a:rPr lang="en-US" altLang="zh-TW" smtClean="0"/>
+              <a:rPr lang="en-US" altLang="zh-TW"/>
               <a:t>Click to edit Master title style</a:t>
             </a:r>
             <a:endParaRPr lang="zh-TW" altLang="en-US"/>
@@ -2103,7 +2107,7 @@
           <a:p>
             <a:pPr lvl="0"/>
             <a:r>
-              <a:rPr lang="en-US" altLang="zh-TW" smtClean="0"/>
+              <a:rPr lang="en-US" altLang="zh-TW"/>
               <a:t>Edit Master text styles</a:t>
             </a:r>
           </a:p>
@@ -2159,35 +2163,35 @@
           <a:p>
             <a:pPr lvl="0"/>
             <a:r>
-              <a:rPr lang="en-US" altLang="zh-TW" smtClean="0"/>
+              <a:rPr lang="en-US" altLang="zh-TW"/>
               <a:t>Edit Master text styles</a:t>
             </a:r>
           </a:p>
           <a:p>
             <a:pPr lvl="1"/>
             <a:r>
-              <a:rPr lang="en-US" altLang="zh-TW" smtClean="0"/>
+              <a:rPr lang="en-US" altLang="zh-TW"/>
               <a:t>Second level</a:t>
             </a:r>
           </a:p>
           <a:p>
             <a:pPr lvl="2"/>
             <a:r>
-              <a:rPr lang="en-US" altLang="zh-TW" smtClean="0"/>
+              <a:rPr lang="en-US" altLang="zh-TW"/>
               <a:t>Third level</a:t>
             </a:r>
           </a:p>
           <a:p>
             <a:pPr lvl="3"/>
             <a:r>
-              <a:rPr lang="en-US" altLang="zh-TW" smtClean="0"/>
+              <a:rPr lang="en-US" altLang="zh-TW"/>
               <a:t>Fourth level</a:t>
             </a:r>
           </a:p>
           <a:p>
             <a:pPr lvl="4"/>
             <a:r>
-              <a:rPr lang="en-US" altLang="zh-TW" smtClean="0"/>
+              <a:rPr lang="en-US" altLang="zh-TW"/>
               <a:t>Fifth level</a:t>
             </a:r>
             <a:endParaRPr lang="zh-TW" altLang="en-US"/>
@@ -2253,7 +2257,7 @@
           <a:p>
             <a:pPr lvl="0"/>
             <a:r>
-              <a:rPr lang="en-US" altLang="zh-TW" smtClean="0"/>
+              <a:rPr lang="en-US" altLang="zh-TW"/>
               <a:t>Edit Master text styles</a:t>
             </a:r>
           </a:p>
@@ -2309,35 +2313,35 @@
           <a:p>
             <a:pPr lvl="0"/>
             <a:r>
-              <a:rPr lang="en-US" altLang="zh-TW" smtClean="0"/>
+              <a:rPr lang="en-US" altLang="zh-TW"/>
               <a:t>Edit Master text styles</a:t>
             </a:r>
           </a:p>
           <a:p>
             <a:pPr lvl="1"/>
             <a:r>
-              <a:rPr lang="en-US" altLang="zh-TW" smtClean="0"/>
+              <a:rPr lang="en-US" altLang="zh-TW"/>
               <a:t>Second level</a:t>
             </a:r>
           </a:p>
           <a:p>
             <a:pPr lvl="2"/>
             <a:r>
-              <a:rPr lang="en-US" altLang="zh-TW" smtClean="0"/>
+              <a:rPr lang="en-US" altLang="zh-TW"/>
               <a:t>Third level</a:t>
             </a:r>
           </a:p>
           <a:p>
             <a:pPr lvl="3"/>
             <a:r>
-              <a:rPr lang="en-US" altLang="zh-TW" smtClean="0"/>
+              <a:rPr lang="en-US" altLang="zh-TW"/>
               <a:t>Fourth level</a:t>
             </a:r>
           </a:p>
           <a:p>
             <a:pPr lvl="4"/>
             <a:r>
-              <a:rPr lang="en-US" altLang="zh-TW" smtClean="0"/>
+              <a:rPr lang="en-US" altLang="zh-TW"/>
               <a:t>Fifth level</a:t>
             </a:r>
             <a:endParaRPr lang="zh-TW" altLang="en-US"/>
@@ -2460,7 +2464,7 @@
           <a:lstStyle/>
           <a:p>
             <a:r>
-              <a:rPr lang="en-US" altLang="zh-TW" smtClean="0"/>
+              <a:rPr lang="en-US" altLang="zh-TW"/>
               <a:t>Click to edit Master title style</a:t>
             </a:r>
             <a:endParaRPr lang="zh-TW" altLang="en-US"/>
@@ -2692,7 +2696,7 @@
           </a:lstStyle>
           <a:p>
             <a:r>
-              <a:rPr lang="en-US" altLang="zh-TW" smtClean="0"/>
+              <a:rPr lang="en-US" altLang="zh-TW"/>
               <a:t>Click to edit Master title style</a:t>
             </a:r>
             <a:endParaRPr lang="zh-TW" altLang="en-US"/>
@@ -2749,35 +2753,35 @@
           <a:p>
             <a:pPr lvl="0"/>
             <a:r>
-              <a:rPr lang="en-US" altLang="zh-TW" smtClean="0"/>
+              <a:rPr lang="en-US" altLang="zh-TW"/>
               <a:t>Edit Master text styles</a:t>
             </a:r>
           </a:p>
           <a:p>
             <a:pPr lvl="1"/>
             <a:r>
-              <a:rPr lang="en-US" altLang="zh-TW" smtClean="0"/>
+              <a:rPr lang="en-US" altLang="zh-TW"/>
               <a:t>Second level</a:t>
             </a:r>
           </a:p>
           <a:p>
             <a:pPr lvl="2"/>
             <a:r>
-              <a:rPr lang="en-US" altLang="zh-TW" smtClean="0"/>
+              <a:rPr lang="en-US" altLang="zh-TW"/>
               <a:t>Third level</a:t>
             </a:r>
           </a:p>
           <a:p>
             <a:pPr lvl="3"/>
             <a:r>
-              <a:rPr lang="en-US" altLang="zh-TW" smtClean="0"/>
+              <a:rPr lang="en-US" altLang="zh-TW"/>
               <a:t>Fourth level</a:t>
             </a:r>
           </a:p>
           <a:p>
             <a:pPr lvl="4"/>
             <a:r>
-              <a:rPr lang="en-US" altLang="zh-TW" smtClean="0"/>
+              <a:rPr lang="en-US" altLang="zh-TW"/>
               <a:t>Fifth level</a:t>
             </a:r>
             <a:endParaRPr lang="zh-TW" altLang="en-US"/>
@@ -2843,7 +2847,7 @@
           <a:p>
             <a:pPr lvl="0"/>
             <a:r>
-              <a:rPr lang="en-US" altLang="zh-TW" smtClean="0"/>
+              <a:rPr lang="en-US" altLang="zh-TW"/>
               <a:t>Edit Master text styles</a:t>
             </a:r>
           </a:p>
@@ -2974,7 +2978,7 @@
           </a:lstStyle>
           <a:p>
             <a:r>
-              <a:rPr lang="en-US" altLang="zh-TW" smtClean="0"/>
+              <a:rPr lang="en-US" altLang="zh-TW"/>
               <a:t>Click to edit Master title style</a:t>
             </a:r>
             <a:endParaRPr lang="zh-TW" altLang="en-US"/>
@@ -3039,7 +3043,7 @@
           </a:lstStyle>
           <a:p>
             <a:r>
-              <a:rPr lang="en-US" altLang="zh-TW" smtClean="0"/>
+              <a:rPr lang="en-US" altLang="zh-TW"/>
               <a:t>Click icon to add picture</a:t>
             </a:r>
             <a:endParaRPr lang="zh-TW" altLang="en-US"/>
@@ -3105,7 +3109,7 @@
           <a:p>
             <a:pPr lvl="0"/>
             <a:r>
-              <a:rPr lang="en-US" altLang="zh-TW" smtClean="0"/>
+              <a:rPr lang="en-US" altLang="zh-TW"/>
               <a:t>Edit Master text styles</a:t>
             </a:r>
           </a:p>
@@ -3247,10 +3251,9 @@
           <a:lstStyle/>
           <a:p>
             <a:r>
-              <a:rPr lang="zh-TW" altLang="en-US" smtClean="0"/>
+              <a:rPr lang="zh-TW" altLang="en-US"/>
               <a:t>按一下以編輯母片標題樣式</a:t>
             </a:r>
-            <a:endParaRPr lang="zh-TW" altLang="en-US"/>
           </a:p>
         </p:txBody>
       </p:sp>
@@ -3281,38 +3284,37 @@
           <a:p>
             <a:pPr lvl="0"/>
             <a:r>
-              <a:rPr lang="zh-TW" altLang="en-US" smtClean="0"/>
+              <a:rPr lang="zh-TW" altLang="en-US"/>
               <a:t>按一下以編輯母片文字樣式</a:t>
             </a:r>
           </a:p>
           <a:p>
             <a:pPr lvl="1"/>
             <a:r>
-              <a:rPr lang="zh-TW" altLang="en-US" smtClean="0"/>
+              <a:rPr lang="zh-TW" altLang="en-US"/>
               <a:t>第二層</a:t>
             </a:r>
           </a:p>
           <a:p>
             <a:pPr lvl="2"/>
             <a:r>
-              <a:rPr lang="zh-TW" altLang="en-US" smtClean="0"/>
+              <a:rPr lang="zh-TW" altLang="en-US"/>
               <a:t>第三層</a:t>
             </a:r>
           </a:p>
           <a:p>
             <a:pPr lvl="3"/>
             <a:r>
-              <a:rPr lang="zh-TW" altLang="en-US" smtClean="0"/>
+              <a:rPr lang="zh-TW" altLang="en-US"/>
               <a:t>第四層</a:t>
             </a:r>
           </a:p>
           <a:p>
             <a:pPr lvl="4"/>
             <a:r>
-              <a:rPr lang="zh-TW" altLang="en-US" smtClean="0"/>
+              <a:rPr lang="zh-TW" altLang="en-US"/>
               <a:t>第五層</a:t>
             </a:r>
-            <a:endParaRPr lang="zh-TW" altLang="en-US"/>
           </a:p>
         </p:txBody>
       </p:sp>
@@ -3787,23 +3789,6 @@
               </a:rPr>
               <a:t>144</a:t>
             </a:r>
-            <a:r>
-              <a:rPr lang="en-US" altLang="zh-CN" sz="7200" b="1" i="1" dirty="0">
-                <a:solidFill>
-                  <a:srgbClr val="660033"/>
-                </a:solidFill>
-                <a:effectLst>
-                  <a:outerShdw blurRad="38100" dist="38100" dir="2700000" algn="tl">
-                    <a:srgbClr val="000000">
-                      <a:alpha val="43137"/>
-                    </a:srgbClr>
-                  </a:outerShdw>
-                </a:effectLst>
-                <a:latin typeface="微軟正黑體" pitchFamily="34" charset="-120"/>
-                <a:ea typeface="微軟正黑體" pitchFamily="34" charset="-120"/>
-              </a:rPr>
-              <a:t/>
-            </a:r>
             <a:br>
               <a:rPr lang="en-US" altLang="zh-CN" sz="7200" b="1" i="1" dirty="0">
                 <a:solidFill>
@@ -3864,13 +3849,6 @@
   <p:clrMapOvr>
     <a:masterClrMapping/>
   </p:clrMapOvr>
-  <p:timing>
-    <p:tnLst>
-      <p:par>
-        <p:cTn id="1" dur="indefinite" restart="never" nodeType="tmRoot"/>
-      </p:par>
-    </p:tnLst>
-  </p:timing>
 </p:sld>
 </file>
 
@@ -3974,25 +3952,7 @@
                 </a:solidFill>
                 <a:latin typeface="+mn-lt"/>
               </a:rPr>
-              <a:t>( </a:t>
-            </a:r>
-            <a:r>
-              <a:rPr lang="en-US" sz="3600" b="1" dirty="0">
-                <a:solidFill>
-                  <a:srgbClr val="660033"/>
-                </a:solidFill>
-                <a:latin typeface="+mn-lt"/>
-              </a:rPr>
-              <a:t>3 </a:t>
-            </a:r>
-            <a:r>
-              <a:rPr lang="en-US" sz="3600" b="1" dirty="0">
-                <a:solidFill>
-                  <a:srgbClr val="660033"/>
-                </a:solidFill>
-                <a:latin typeface="+mn-lt"/>
-              </a:rPr>
-              <a:t>/ 4 )</a:t>
+              <a:t>( 3 / 4 )</a:t>
             </a:r>
             <a:endParaRPr lang="vi-VN" sz="3600" b="1" dirty="0">
               <a:solidFill>
@@ -4013,13 +3973,6 @@
   <p:clrMapOvr>
     <a:masterClrMapping/>
   </p:clrMapOvr>
-  <p:timing>
-    <p:tnLst>
-      <p:par>
-        <p:cTn id="1" dur="indefinite" restart="never" nodeType="tmRoot"/>
-      </p:par>
-    </p:tnLst>
-  </p:timing>
 </p:sld>
 </file>
 
@@ -4144,13 +4097,6 @@
   <p:clrMapOvr>
     <a:masterClrMapping/>
   </p:clrMapOvr>
-  <p:timing>
-    <p:tnLst>
-      <p:par>
-        <p:cTn id="1" dur="indefinite" restart="never" nodeType="tmRoot"/>
-      </p:par>
-    </p:tnLst>
-  </p:timing>
 </p:sld>
 </file>
 
@@ -4234,13 +4180,6 @@
   <p:clrMapOvr>
     <a:masterClrMapping/>
   </p:clrMapOvr>
-  <p:timing>
-    <p:tnLst>
-      <p:par>
-        <p:cTn id="1" dur="indefinite" restart="never" nodeType="tmRoot"/>
-      </p:par>
-    </p:tnLst>
-  </p:timing>
 </p:sld>
 </file>
 
@@ -4330,7 +4269,13 @@
       </p:sp>
       <p:sp>
         <p:nvSpPr>
-          <p:cNvPr id="2" name="TextBox 1"/>
+          <p:cNvPr id="3" name="TextBox 2">
+            <a:extLst>
+              <a:ext uri="{FF2B5EF4-FFF2-40B4-BE49-F238E27FC236}">
+                <a16:creationId xmlns:a16="http://schemas.microsoft.com/office/drawing/2014/main" id="{D0CA037B-B235-5382-B190-6EBCC65A9246}"/>
+              </a:ext>
+            </a:extLst>
+          </p:cNvPr>
           <p:cNvSpPr txBox="1"/>
           <p:nvPr/>
         </p:nvSpPr>
@@ -4356,15 +4301,37 @@
                 <a:solidFill>
                   <a:srgbClr val="660033"/>
                 </a:solidFill>
-                <a:latin typeface="+mn-lt"/>
+                <a:latin typeface="Microsoft JhengHei" panose="020B0604030504040204" pitchFamily="34" charset="-120"/>
+                <a:ea typeface="Microsoft JhengHei" panose="020B0604030504040204" pitchFamily="34" charset="-120"/>
               </a:rPr>
-              <a:t>( x2 )</a:t>
+              <a:t>( 2 </a:t>
+            </a:r>
+            <a:r>
+              <a:rPr lang="zh-CN" altLang="en-US" sz="3600" b="1" dirty="0">
+                <a:solidFill>
+                  <a:srgbClr val="660033"/>
+                </a:solidFill>
+                <a:latin typeface="Microsoft JhengHei" panose="020B0604030504040204" pitchFamily="34" charset="-120"/>
+                <a:ea typeface="Microsoft JhengHei" panose="020B0604030504040204" pitchFamily="34" charset="-120"/>
+              </a:rPr>
+              <a:t>次</a:t>
+            </a:r>
+            <a:r>
+              <a:rPr lang="en-US" sz="3600" b="1" dirty="0">
+                <a:solidFill>
+                  <a:srgbClr val="660033"/>
+                </a:solidFill>
+                <a:latin typeface="Microsoft JhengHei" panose="020B0604030504040204" pitchFamily="34" charset="-120"/>
+                <a:ea typeface="Microsoft JhengHei" panose="020B0604030504040204" pitchFamily="34" charset="-120"/>
+              </a:rPr>
+              <a:t> )</a:t>
             </a:r>
             <a:endParaRPr lang="vi-VN" sz="3600" b="1" dirty="0">
               <a:solidFill>
                 <a:srgbClr val="660033"/>
               </a:solidFill>
               <a:latin typeface="+mn-lt"/>
+              <a:ea typeface="Microsoft JhengHei" panose="020B0604030504040204" pitchFamily="34" charset="-120"/>
             </a:endParaRPr>
           </a:p>
         </p:txBody>
@@ -4379,13 +4346,6 @@
   <p:clrMapOvr>
     <a:masterClrMapping/>
   </p:clrMapOvr>
-  <p:timing>
-    <p:tnLst>
-      <p:par>
-        <p:cTn id="1" dur="indefinite" restart="never" nodeType="tmRoot"/>
-      </p:par>
-    </p:tnLst>
-  </p:timing>
 </p:sld>
 </file>
 
@@ -4489,25 +4449,7 @@
                 </a:solidFill>
                 <a:latin typeface="+mn-lt"/>
               </a:rPr>
-              <a:t>( </a:t>
-            </a:r>
-            <a:r>
-              <a:rPr lang="en-US" sz="3600" b="1" dirty="0">
-                <a:solidFill>
-                  <a:srgbClr val="660033"/>
-                </a:solidFill>
-                <a:latin typeface="+mn-lt"/>
-              </a:rPr>
-              <a:t>4 </a:t>
-            </a:r>
-            <a:r>
-              <a:rPr lang="en-US" sz="3600" b="1" dirty="0">
-                <a:solidFill>
-                  <a:srgbClr val="660033"/>
-                </a:solidFill>
-                <a:latin typeface="+mn-lt"/>
-              </a:rPr>
-              <a:t>/ 4 )</a:t>
+              <a:t>( 4 / 4 )</a:t>
             </a:r>
             <a:endParaRPr lang="vi-VN" sz="3600" b="1" dirty="0">
               <a:solidFill>
@@ -4528,13 +4470,6 @@
   <p:clrMapOvr>
     <a:masterClrMapping/>
   </p:clrMapOvr>
-  <p:timing>
-    <p:tnLst>
-      <p:par>
-        <p:cTn id="1" dur="indefinite" restart="never" nodeType="tmRoot"/>
-      </p:par>
-    </p:tnLst>
-  </p:timing>
 </p:sld>
 </file>
 
@@ -4659,13 +4594,6 @@
   <p:clrMapOvr>
     <a:masterClrMapping/>
   </p:clrMapOvr>
-  <p:timing>
-    <p:tnLst>
-      <p:par>
-        <p:cTn id="1" dur="indefinite" restart="never" nodeType="tmRoot"/>
-      </p:par>
-    </p:tnLst>
-  </p:timing>
 </p:sld>
 </file>
 
@@ -4749,13 +4677,6 @@
   <p:clrMapOvr>
     <a:masterClrMapping/>
   </p:clrMapOvr>
-  <p:timing>
-    <p:tnLst>
-      <p:par>
-        <p:cTn id="1" dur="indefinite" restart="never" nodeType="tmRoot"/>
-      </p:par>
-    </p:tnLst>
-  </p:timing>
 </p:sld>
 </file>
 
@@ -4845,7 +4766,13 @@
       </p:sp>
       <p:sp>
         <p:nvSpPr>
-          <p:cNvPr id="2" name="TextBox 1"/>
+          <p:cNvPr id="3" name="TextBox 2">
+            <a:extLst>
+              <a:ext uri="{FF2B5EF4-FFF2-40B4-BE49-F238E27FC236}">
+                <a16:creationId xmlns:a16="http://schemas.microsoft.com/office/drawing/2014/main" id="{C407DB48-A1CA-B357-D750-E22B9ED42313}"/>
+              </a:ext>
+            </a:extLst>
+          </p:cNvPr>
           <p:cNvSpPr txBox="1"/>
           <p:nvPr/>
         </p:nvSpPr>
@@ -4871,15 +4798,37 @@
                 <a:solidFill>
                   <a:srgbClr val="660033"/>
                 </a:solidFill>
-                <a:latin typeface="+mn-lt"/>
+                <a:latin typeface="Microsoft JhengHei" panose="020B0604030504040204" pitchFamily="34" charset="-120"/>
+                <a:ea typeface="Microsoft JhengHei" panose="020B0604030504040204" pitchFamily="34" charset="-120"/>
               </a:rPr>
-              <a:t>( x2 )</a:t>
+              <a:t>( 2 </a:t>
+            </a:r>
+            <a:r>
+              <a:rPr lang="zh-CN" altLang="en-US" sz="3600" b="1" dirty="0">
+                <a:solidFill>
+                  <a:srgbClr val="660033"/>
+                </a:solidFill>
+                <a:latin typeface="Microsoft JhengHei" panose="020B0604030504040204" pitchFamily="34" charset="-120"/>
+                <a:ea typeface="Microsoft JhengHei" panose="020B0604030504040204" pitchFamily="34" charset="-120"/>
+              </a:rPr>
+              <a:t>次</a:t>
+            </a:r>
+            <a:r>
+              <a:rPr lang="en-US" sz="3600" b="1" dirty="0">
+                <a:solidFill>
+                  <a:srgbClr val="660033"/>
+                </a:solidFill>
+                <a:latin typeface="Microsoft JhengHei" panose="020B0604030504040204" pitchFamily="34" charset="-120"/>
+                <a:ea typeface="Microsoft JhengHei" panose="020B0604030504040204" pitchFamily="34" charset="-120"/>
+              </a:rPr>
+              <a:t> )</a:t>
             </a:r>
             <a:endParaRPr lang="vi-VN" sz="3600" b="1" dirty="0">
               <a:solidFill>
                 <a:srgbClr val="660033"/>
               </a:solidFill>
               <a:latin typeface="+mn-lt"/>
+              <a:ea typeface="Microsoft JhengHei" panose="020B0604030504040204" pitchFamily="34" charset="-120"/>
             </a:endParaRPr>
           </a:p>
         </p:txBody>
@@ -4894,13 +4843,6 @@
   <p:clrMapOvr>
     <a:masterClrMapping/>
   </p:clrMapOvr>
-  <p:timing>
-    <p:tnLst>
-      <p:par>
-        <p:cTn id="1" dur="indefinite" restart="never" nodeType="tmRoot"/>
-      </p:par>
-    </p:tnLst>
-  </p:timing>
 </p:sld>
 </file>
 
@@ -5012,17 +4954,7 @@
                 <a:effectLst/>
                 <a:latin typeface="+mn-lt"/>
               </a:rPr>
-              <a:t>( 1 </a:t>
-            </a:r>
-            <a:r>
-              <a:rPr lang="en-US" sz="3600" b="1" dirty="0" smtClean="0">
-                <a:solidFill>
-                  <a:srgbClr val="660033"/>
-                </a:solidFill>
-                <a:effectLst/>
-                <a:latin typeface="+mn-lt"/>
-              </a:rPr>
-              <a:t>/ 4 )</a:t>
+              <a:t>( 1 / 4 )</a:t>
             </a:r>
             <a:endParaRPr lang="vi-VN" sz="3600" b="1" dirty="0">
               <a:solidFill>
@@ -5044,13 +4976,6 @@
   <p:clrMapOvr>
     <a:masterClrMapping/>
   </p:clrMapOvr>
-  <p:timing>
-    <p:tnLst>
-      <p:par>
-        <p:cTn id="1" dur="indefinite" restart="never" nodeType="tmRoot"/>
-      </p:par>
-    </p:tnLst>
-  </p:timing>
 </p:sld>
 </file>
 
@@ -5175,13 +5100,6 @@
   <p:clrMapOvr>
     <a:masterClrMapping/>
   </p:clrMapOvr>
-  <p:timing>
-    <p:tnLst>
-      <p:par>
-        <p:cTn id="1" dur="indefinite" restart="never" nodeType="tmRoot"/>
-      </p:par>
-    </p:tnLst>
-  </p:timing>
 </p:sld>
 </file>
 
@@ -5265,13 +5183,6 @@
   <p:clrMapOvr>
     <a:masterClrMapping/>
   </p:clrMapOvr>
-  <p:timing>
-    <p:tnLst>
-      <p:par>
-        <p:cTn id="1" dur="indefinite" restart="never" nodeType="tmRoot"/>
-      </p:par>
-    </p:tnLst>
-  </p:timing>
 </p:sld>
 </file>
 
@@ -5387,15 +5298,37 @@
                 <a:solidFill>
                   <a:srgbClr val="660033"/>
                 </a:solidFill>
-                <a:latin typeface="+mn-lt"/>
+                <a:latin typeface="Microsoft JhengHei" panose="020B0604030504040204" pitchFamily="34" charset="-120"/>
+                <a:ea typeface="Microsoft JhengHei" panose="020B0604030504040204" pitchFamily="34" charset="-120"/>
               </a:rPr>
-              <a:t>( x2 )</a:t>
+              <a:t>( 2 </a:t>
+            </a:r>
+            <a:r>
+              <a:rPr lang="zh-CN" altLang="en-US" sz="3600" b="1" dirty="0">
+                <a:solidFill>
+                  <a:srgbClr val="660033"/>
+                </a:solidFill>
+                <a:latin typeface="Microsoft JhengHei" panose="020B0604030504040204" pitchFamily="34" charset="-120"/>
+                <a:ea typeface="Microsoft JhengHei" panose="020B0604030504040204" pitchFamily="34" charset="-120"/>
+              </a:rPr>
+              <a:t>次</a:t>
+            </a:r>
+            <a:r>
+              <a:rPr lang="en-US" sz="3600" b="1" dirty="0">
+                <a:solidFill>
+                  <a:srgbClr val="660033"/>
+                </a:solidFill>
+                <a:latin typeface="Microsoft JhengHei" panose="020B0604030504040204" pitchFamily="34" charset="-120"/>
+                <a:ea typeface="Microsoft JhengHei" panose="020B0604030504040204" pitchFamily="34" charset="-120"/>
+              </a:rPr>
+              <a:t> )</a:t>
             </a:r>
             <a:endParaRPr lang="vi-VN" sz="3600" b="1" dirty="0">
               <a:solidFill>
                 <a:srgbClr val="660033"/>
               </a:solidFill>
               <a:latin typeface="+mn-lt"/>
+              <a:ea typeface="Microsoft JhengHei" panose="020B0604030504040204" pitchFamily="34" charset="-120"/>
             </a:endParaRPr>
           </a:p>
         </p:txBody>
@@ -5410,13 +5343,6 @@
   <p:clrMapOvr>
     <a:masterClrMapping/>
   </p:clrMapOvr>
-  <p:timing>
-    <p:tnLst>
-      <p:par>
-        <p:cTn id="1" dur="indefinite" restart="never" nodeType="tmRoot"/>
-      </p:par>
-    </p:tnLst>
-  </p:timing>
 </p:sld>
 </file>
 
@@ -5520,25 +5446,7 @@
                 </a:solidFill>
                 <a:latin typeface="+mn-lt"/>
               </a:rPr>
-              <a:t>( </a:t>
-            </a:r>
-            <a:r>
-              <a:rPr lang="en-US" sz="3600" b="1" dirty="0">
-                <a:solidFill>
-                  <a:srgbClr val="660033"/>
-                </a:solidFill>
-                <a:latin typeface="+mn-lt"/>
-              </a:rPr>
-              <a:t>2 </a:t>
-            </a:r>
-            <a:r>
-              <a:rPr lang="en-US" sz="3600" b="1" dirty="0">
-                <a:solidFill>
-                  <a:srgbClr val="660033"/>
-                </a:solidFill>
-                <a:latin typeface="+mn-lt"/>
-              </a:rPr>
-              <a:t>/ 4 )</a:t>
+              <a:t>( 2 / 4 )</a:t>
             </a:r>
             <a:endParaRPr lang="vi-VN" sz="3600" b="1" dirty="0">
               <a:solidFill>
@@ -5559,13 +5467,6 @@
   <p:clrMapOvr>
     <a:masterClrMapping/>
   </p:clrMapOvr>
-  <p:timing>
-    <p:tnLst>
-      <p:par>
-        <p:cTn id="1" dur="indefinite" restart="never" nodeType="tmRoot"/>
-      </p:par>
-    </p:tnLst>
-  </p:timing>
 </p:sld>
 </file>
 
@@ -5690,13 +5591,6 @@
   <p:clrMapOvr>
     <a:masterClrMapping/>
   </p:clrMapOvr>
-  <p:timing>
-    <p:tnLst>
-      <p:par>
-        <p:cTn id="1" dur="indefinite" restart="never" nodeType="tmRoot"/>
-      </p:par>
-    </p:tnLst>
-  </p:timing>
 </p:sld>
 </file>
 
@@ -5780,13 +5674,6 @@
   <p:clrMapOvr>
     <a:masterClrMapping/>
   </p:clrMapOvr>
-  <p:timing>
-    <p:tnLst>
-      <p:par>
-        <p:cTn id="1" dur="indefinite" restart="never" nodeType="tmRoot"/>
-      </p:par>
-    </p:tnLst>
-  </p:timing>
 </p:sld>
 </file>
 
@@ -5876,7 +5763,13 @@
       </p:sp>
       <p:sp>
         <p:nvSpPr>
-          <p:cNvPr id="2" name="TextBox 1"/>
+          <p:cNvPr id="3" name="TextBox 2">
+            <a:extLst>
+              <a:ext uri="{FF2B5EF4-FFF2-40B4-BE49-F238E27FC236}">
+                <a16:creationId xmlns:a16="http://schemas.microsoft.com/office/drawing/2014/main" id="{8243C00F-BCD8-89CD-E374-2CC3DE3A73B6}"/>
+              </a:ext>
+            </a:extLst>
+          </p:cNvPr>
           <p:cNvSpPr txBox="1"/>
           <p:nvPr/>
         </p:nvSpPr>
@@ -5902,15 +5795,37 @@
                 <a:solidFill>
                   <a:srgbClr val="660033"/>
                 </a:solidFill>
-                <a:latin typeface="+mn-lt"/>
+                <a:latin typeface="Microsoft JhengHei" panose="020B0604030504040204" pitchFamily="34" charset="-120"/>
+                <a:ea typeface="Microsoft JhengHei" panose="020B0604030504040204" pitchFamily="34" charset="-120"/>
               </a:rPr>
-              <a:t>( x2 )</a:t>
+              <a:t>( 2 </a:t>
+            </a:r>
+            <a:r>
+              <a:rPr lang="zh-CN" altLang="en-US" sz="3600" b="1" dirty="0">
+                <a:solidFill>
+                  <a:srgbClr val="660033"/>
+                </a:solidFill>
+                <a:latin typeface="Microsoft JhengHei" panose="020B0604030504040204" pitchFamily="34" charset="-120"/>
+                <a:ea typeface="Microsoft JhengHei" panose="020B0604030504040204" pitchFamily="34" charset="-120"/>
+              </a:rPr>
+              <a:t>次</a:t>
+            </a:r>
+            <a:r>
+              <a:rPr lang="en-US" sz="3600" b="1" dirty="0">
+                <a:solidFill>
+                  <a:srgbClr val="660033"/>
+                </a:solidFill>
+                <a:latin typeface="Microsoft JhengHei" panose="020B0604030504040204" pitchFamily="34" charset="-120"/>
+                <a:ea typeface="Microsoft JhengHei" panose="020B0604030504040204" pitchFamily="34" charset="-120"/>
+              </a:rPr>
+              <a:t> )</a:t>
             </a:r>
             <a:endParaRPr lang="vi-VN" sz="3600" b="1" dirty="0">
               <a:solidFill>
                 <a:srgbClr val="660033"/>
               </a:solidFill>
               <a:latin typeface="+mn-lt"/>
+              <a:ea typeface="Microsoft JhengHei" panose="020B0604030504040204" pitchFamily="34" charset="-120"/>
             </a:endParaRPr>
           </a:p>
         </p:txBody>
@@ -5925,13 +5840,6 @@
   <p:clrMapOvr>
     <a:masterClrMapping/>
   </p:clrMapOvr>
-  <p:timing>
-    <p:tnLst>
-      <p:par>
-        <p:cTn id="1" dur="indefinite" restart="never" nodeType="tmRoot"/>
-      </p:par>
-    </p:tnLst>
-  </p:timing>
 </p:sld>
 </file>
 
